--- a/set/2026-08-23 ECBC-CH.pptx
+++ b/set/2026-08-23 ECBC-CH.pptx
@@ -302,7 +302,7 @@
           <a:p>
             <a:fld id="{E759A0DE-F190-5444-87AC-4719D5F20D15}" type="datetimeFigureOut">
               <a:rPr lang="en-US" smtClean="0"/>
-              <a:t>8/22/26</a:t>
+              <a:t>8/23/26</a:t>
             </a:fld>
             <a:endParaRPr lang="en-US"/>
           </a:p>
@@ -500,7 +500,7 @@
           <a:p>
             <a:fld id="{E759A0DE-F190-5444-87AC-4719D5F20D15}" type="datetimeFigureOut">
               <a:rPr lang="en-US" smtClean="0"/>
-              <a:t>8/22/26</a:t>
+              <a:t>8/23/26</a:t>
             </a:fld>
             <a:endParaRPr lang="en-US"/>
           </a:p>
@@ -708,7 +708,7 @@
           <a:p>
             <a:fld id="{E759A0DE-F190-5444-87AC-4719D5F20D15}" type="datetimeFigureOut">
               <a:rPr lang="en-US" smtClean="0"/>
-              <a:t>8/22/26</a:t>
+              <a:t>8/23/26</a:t>
             </a:fld>
             <a:endParaRPr lang="en-US"/>
           </a:p>
@@ -906,7 +906,7 @@
           <a:p>
             <a:fld id="{E759A0DE-F190-5444-87AC-4719D5F20D15}" type="datetimeFigureOut">
               <a:rPr lang="en-US" smtClean="0"/>
-              <a:t>8/22/26</a:t>
+              <a:t>8/23/26</a:t>
             </a:fld>
             <a:endParaRPr lang="en-US"/>
           </a:p>
@@ -1181,7 +1181,7 @@
           <a:p>
             <a:fld id="{E759A0DE-F190-5444-87AC-4719D5F20D15}" type="datetimeFigureOut">
               <a:rPr lang="en-US" smtClean="0"/>
-              <a:t>8/22/26</a:t>
+              <a:t>8/23/26</a:t>
             </a:fld>
             <a:endParaRPr lang="en-US"/>
           </a:p>
@@ -1446,7 +1446,7 @@
           <a:p>
             <a:fld id="{E759A0DE-F190-5444-87AC-4719D5F20D15}" type="datetimeFigureOut">
               <a:rPr lang="en-US" smtClean="0"/>
-              <a:t>8/22/26</a:t>
+              <a:t>8/23/26</a:t>
             </a:fld>
             <a:endParaRPr lang="en-US"/>
           </a:p>
@@ -1858,7 +1858,7 @@
           <a:p>
             <a:fld id="{E759A0DE-F190-5444-87AC-4719D5F20D15}" type="datetimeFigureOut">
               <a:rPr lang="en-US" smtClean="0"/>
-              <a:t>8/22/26</a:t>
+              <a:t>8/23/26</a:t>
             </a:fld>
             <a:endParaRPr lang="en-US"/>
           </a:p>
@@ -1999,7 +1999,7 @@
           <a:p>
             <a:fld id="{E759A0DE-F190-5444-87AC-4719D5F20D15}" type="datetimeFigureOut">
               <a:rPr lang="en-US" smtClean="0"/>
-              <a:t>8/22/26</a:t>
+              <a:t>8/23/26</a:t>
             </a:fld>
             <a:endParaRPr lang="en-US"/>
           </a:p>
@@ -2112,7 +2112,7 @@
           <a:p>
             <a:fld id="{E759A0DE-F190-5444-87AC-4719D5F20D15}" type="datetimeFigureOut">
               <a:rPr lang="en-US" smtClean="0"/>
-              <a:t>8/22/26</a:t>
+              <a:t>8/23/26</a:t>
             </a:fld>
             <a:endParaRPr lang="en-US"/>
           </a:p>
@@ -2423,7 +2423,7 @@
           <a:p>
             <a:fld id="{E759A0DE-F190-5444-87AC-4719D5F20D15}" type="datetimeFigureOut">
               <a:rPr lang="en-US" smtClean="0"/>
-              <a:t>8/22/26</a:t>
+              <a:t>8/23/26</a:t>
             </a:fld>
             <a:endParaRPr lang="en-US"/>
           </a:p>
@@ -2711,7 +2711,7 @@
           <a:p>
             <a:fld id="{E759A0DE-F190-5444-87AC-4719D5F20D15}" type="datetimeFigureOut">
               <a:rPr lang="en-US" smtClean="0"/>
-              <a:t>8/22/26</a:t>
+              <a:t>8/23/26</a:t>
             </a:fld>
             <a:endParaRPr lang="en-US"/>
           </a:p>
@@ -2952,7 +2952,7 @@
           <a:p>
             <a:fld id="{E759A0DE-F190-5444-87AC-4719D5F20D15}" type="datetimeFigureOut">
               <a:rPr lang="en-US" smtClean="0"/>
-              <a:t>8/22/26</a:t>
+              <a:t>8/23/26</a:t>
             </a:fld>
             <a:endParaRPr lang="en-US"/>
           </a:p>
@@ -7017,7 +7017,7 @@
                 <a:ea typeface="+mn-ea"/>
                 <a:cs typeface="+mn-cs"/>
               </a:rPr>
-              <a:t>REPEAT 3x and END</a:t>
+              <a:t>REPEAT 2x and END</a:t>
             </a:r>
           </a:p>
         </p:txBody>
@@ -13707,6 +13707,16 @@
           <a:p>
             <a:pPr algn="l"/>
             <a:r>
+              <a:rPr lang="en-US" sz="3600" dirty="0">
+                <a:solidFill>
+                  <a:srgbClr val="FFFF00"/>
+                </a:solidFill>
+                <a:latin typeface="Avenir Medium" panose="02000503020000020003" pitchFamily="2" charset="0"/>
+                <a:ea typeface="Bodoni Ornaments" pitchFamily="2" charset="0"/>
+              </a:rPr>
+              <a:t>C / Am / F </a:t>
+            </a:r>
+            <a:r>
               <a:rPr lang="en-US" sz="3600">
                 <a:solidFill>
                   <a:srgbClr val="FFFF00"/>
@@ -13714,7 +13724,7 @@
                 <a:latin typeface="Avenir Medium" panose="02000503020000020003" pitchFamily="2" charset="0"/>
                 <a:ea typeface="Bodoni Ornaments" pitchFamily="2" charset="0"/>
               </a:rPr>
-              <a:t>C / Am / F / G</a:t>
+              <a:t>/ G         CAPO at 5th</a:t>
             </a:r>
           </a:p>
           <a:p>
